--- a/docs/design/p4/d22-wind-rose-real-ppt.pptx
+++ b/docs/design/p4/d22-wind-rose-real-ppt.pptx
@@ -1291,7 +1291,7 @@
                 <a:ea typeface="Noto Sans KR" pitchFamily="34" charset="-122"/>
                 <a:cs typeface="Noto Sans KR" pitchFamily="34" charset="-120"/>
               </a:rPr>
-              <a:t>3,480㎡</a:t>
+              <a:t>면적 미확인</a:t>
             </a:r>
             <a:endParaRPr lang="en-US" sz="1700" dirty="0"/>
           </a:p>
@@ -1369,7 +1369,7 @@
                 <a:ea typeface="Noto Sans KR" pitchFamily="34" charset="-122"/>
                 <a:cs typeface="Noto Sans KR" pitchFamily="34" charset="-120"/>
               </a:rPr>
-              <a:t>제2종일반주거지역</a:t>
+              <a:t>용도지역 미확인</a:t>
             </a:r>
             <a:endParaRPr lang="en-US" sz="1700" dirty="0"/>
           </a:p>
@@ -1778,7 +1778,7 @@
                 <a:ea typeface="Noto Sans KR" pitchFamily="34" charset="-122"/>
                 <a:cs typeface="Noto Sans KR" pitchFamily="34" charset="-120"/>
               </a:rPr>
-              <a:t>최근접 ASOS 관측소 거리 16,819m 직선</a:t>
+              <a:t>최근접 ASOS 관측소 거리 16.8 km 직선</a:t>
             </a:r>
             <a:endParaRPr lang="en-US" sz="1100" dirty="0"/>
           </a:p>
@@ -2259,7 +2259,7 @@
                 <a:ea typeface="Noto Sans KR" pitchFamily="34" charset="-122"/>
                 <a:cs typeface="Noto Sans KR" pitchFamily="34" charset="-120"/>
               </a:rPr>
-              <a:t>16,819m</a:t>
+              <a:t>16.8 km</a:t>
             </a:r>
             <a:endParaRPr lang="en-US" sz="3600" dirty="0"/>
           </a:p>
@@ -2488,7 +2488,7 @@
                 <a:ea typeface="Noto Sans KR" pitchFamily="34" charset="-122"/>
                 <a:cs typeface="Noto Sans KR" pitchFamily="34" charset="-120"/>
               </a:rPr>
-              <a:t>출처 기상청 ASOS 시간자료 2025-12-31 · © VWorld(국토교통부)</a:t>
+              <a:t>출처 기상청 ASOS 시간자료 2025-12-31</a:t>
             </a:r>
             <a:endParaRPr lang="en-US" sz="900" dirty="0"/>
           </a:p>
